--- a/week04/Lecture04.pptx
+++ b/week04/Lecture04.pptx
@@ -5,7 +5,7 @@
     <p:sldMasterId id="2147483648" r:id="rId1"/>
   </p:sldMasterIdLst>
   <p:notesMasterIdLst>
-    <p:notesMasterId r:id="rId25"/>
+    <p:notesMasterId r:id="rId26"/>
   </p:notesMasterIdLst>
   <p:sldIdLst>
     <p:sldId id="256" r:id="rId2"/>
@@ -31,6 +31,7 @@
     <p:sldId id="289" r:id="rId22"/>
     <p:sldId id="306" r:id="rId23"/>
     <p:sldId id="307" r:id="rId24"/>
+    <p:sldId id="431" r:id="rId25"/>
   </p:sldIdLst>
   <p:sldSz cx="12192000" cy="6858000"/>
   <p:notesSz cx="6858000" cy="9144000"/>
@@ -219,7 +220,7 @@
           <a:p>
             <a:fld id="{634F3F22-B4BB-3F48-9180-464A9F2D66D1}" type="datetimeFigureOut">
               <a:rPr kumimoji="1" lang="zh-CN" altLang="en-US" smtClean="0"/>
-              <a:t>2025/3/9</a:t>
+              <a:t>2026/3/23</a:t>
             </a:fld>
             <a:endParaRPr kumimoji="1" lang="zh-CN" altLang="en-US"/>
           </a:p>
@@ -699,7 +700,7 @@
           <a:p>
             <a:fld id="{FC19A4FA-3D9A-4114-B0D5-759CBD56F1AB}" type="datetimeFigureOut">
               <a:rPr lang="zh-CN" altLang="en-US" smtClean="0"/>
-              <a:t>2025/3/9</a:t>
+              <a:t>2026/3/23</a:t>
             </a:fld>
             <a:endParaRPr lang="zh-CN" altLang="en-US"/>
           </a:p>
@@ -902,7 +903,7 @@
           <a:p>
             <a:fld id="{FC19A4FA-3D9A-4114-B0D5-759CBD56F1AB}" type="datetimeFigureOut">
               <a:rPr lang="zh-CN" altLang="en-US" smtClean="0"/>
-              <a:t>2025/3/9</a:t>
+              <a:t>2026/3/23</a:t>
             </a:fld>
             <a:endParaRPr lang="zh-CN" altLang="en-US"/>
           </a:p>
@@ -1080,7 +1081,7 @@
           <a:p>
             <a:fld id="{FC19A4FA-3D9A-4114-B0D5-759CBD56F1AB}" type="datetimeFigureOut">
               <a:rPr lang="zh-CN" altLang="en-US" smtClean="0"/>
-              <a:t>2025/3/9</a:t>
+              <a:t>2026/3/23</a:t>
             </a:fld>
             <a:endParaRPr lang="zh-CN" altLang="en-US"/>
           </a:p>
@@ -1304,7 +1305,7 @@
           <a:p>
             <a:fld id="{FC19A4FA-3D9A-4114-B0D5-759CBD56F1AB}" type="datetimeFigureOut">
               <a:rPr lang="zh-CN" altLang="en-US" smtClean="0"/>
-              <a:t>2025/3/9</a:t>
+              <a:t>2026/3/23</a:t>
             </a:fld>
             <a:endParaRPr lang="zh-CN" altLang="en-US"/>
           </a:p>
@@ -1538,7 +1539,7 @@
           <a:p>
             <a:fld id="{FC19A4FA-3D9A-4114-B0D5-759CBD56F1AB}" type="datetimeFigureOut">
               <a:rPr lang="zh-CN" altLang="en-US" smtClean="0"/>
-              <a:t>2025/3/9</a:t>
+              <a:t>2026/3/23</a:t>
             </a:fld>
             <a:endParaRPr lang="zh-CN" altLang="en-US"/>
           </a:p>
@@ -1937,7 +1938,7 @@
           <a:p>
             <a:fld id="{FC19A4FA-3D9A-4114-B0D5-759CBD56F1AB}" type="datetimeFigureOut">
               <a:rPr lang="zh-CN" altLang="en-US" smtClean="0"/>
-              <a:t>2025/3/9</a:t>
+              <a:t>2026/3/23</a:t>
             </a:fld>
             <a:endParaRPr lang="zh-CN" altLang="en-US"/>
           </a:p>
@@ -2217,7 +2218,7 @@
           <a:p>
             <a:fld id="{FC19A4FA-3D9A-4114-B0D5-759CBD56F1AB}" type="datetimeFigureOut">
               <a:rPr lang="zh-CN" altLang="en-US" smtClean="0"/>
-              <a:t>2025/3/9</a:t>
+              <a:t>2026/3/23</a:t>
             </a:fld>
             <a:endParaRPr lang="zh-CN" altLang="en-US"/>
           </a:p>
@@ -2369,7 +2370,7 @@
           <a:p>
             <a:fld id="{FC19A4FA-3D9A-4114-B0D5-759CBD56F1AB}" type="datetimeFigureOut">
               <a:rPr lang="zh-CN" altLang="en-US" smtClean="0"/>
-              <a:t>2025/3/9</a:t>
+              <a:t>2026/3/23</a:t>
             </a:fld>
             <a:endParaRPr lang="zh-CN" altLang="en-US"/>
           </a:p>
@@ -2499,7 +2500,7 @@
           <a:p>
             <a:fld id="{FC19A4FA-3D9A-4114-B0D5-759CBD56F1AB}" type="datetimeFigureOut">
               <a:rPr lang="zh-CN" altLang="en-US" smtClean="0"/>
-              <a:t>2025/3/9</a:t>
+              <a:t>2026/3/23</a:t>
             </a:fld>
             <a:endParaRPr lang="zh-CN" altLang="en-US"/>
           </a:p>
@@ -2809,7 +2810,7 @@
           <a:p>
             <a:fld id="{FC19A4FA-3D9A-4114-B0D5-759CBD56F1AB}" type="datetimeFigureOut">
               <a:rPr lang="zh-CN" altLang="en-US" smtClean="0"/>
-              <a:t>2025/3/9</a:t>
+              <a:t>2026/3/23</a:t>
             </a:fld>
             <a:endParaRPr lang="zh-CN" altLang="en-US"/>
           </a:p>
@@ -3096,7 +3097,7 @@
           <a:p>
             <a:fld id="{FC19A4FA-3D9A-4114-B0D5-759CBD56F1AB}" type="datetimeFigureOut">
               <a:rPr lang="zh-CN" altLang="en-US" smtClean="0"/>
-              <a:t>2025/3/9</a:t>
+              <a:t>2026/3/23</a:t>
             </a:fld>
             <a:endParaRPr lang="zh-CN" altLang="en-US"/>
           </a:p>
@@ -3389,7 +3390,7 @@
           <a:p>
             <a:fld id="{FC19A4FA-3D9A-4114-B0D5-759CBD56F1AB}" type="datetimeFigureOut">
               <a:rPr lang="zh-CN" altLang="en-US" smtClean="0"/>
-              <a:t>2025/3/9</a:t>
+              <a:t>2026/3/23</a:t>
             </a:fld>
             <a:endParaRPr lang="zh-CN" altLang="en-US"/>
           </a:p>
@@ -26557,6 +26558,138 @@
       <p:bldP spid="6" grpId="0"/>
     </p:bldLst>
   </p:timing>
+</p:sld>
+</file>
+
+<file path=ppt/slides/slide24.xml><?xml version="1.0" encoding="utf-8"?>
+<p:sld xmlns:a="http://schemas.openxmlformats.org/drawingml/2006/main" xmlns:r="http://schemas.openxmlformats.org/officeDocument/2006/relationships" xmlns:p="http://schemas.openxmlformats.org/presentationml/2006/main">
+  <p:cSld>
+    <p:spTree>
+      <p:nvGrpSpPr>
+        <p:cNvPr id="1" name=""/>
+        <p:cNvGrpSpPr/>
+        <p:nvPr/>
+      </p:nvGrpSpPr>
+      <p:grpSpPr>
+        <a:xfrm>
+          <a:off x="0" y="0"/>
+          <a:ext cx="0" cy="0"/>
+          <a:chOff x="0" y="0"/>
+          <a:chExt cx="0" cy="0"/>
+        </a:xfrm>
+      </p:grpSpPr>
+      <p:sp>
+        <p:nvSpPr>
+          <p:cNvPr id="2" name="标题 1">
+            <a:extLst>
+              <a:ext uri="{FF2B5EF4-FFF2-40B4-BE49-F238E27FC236}">
+                <a16:creationId xmlns:a16="http://schemas.microsoft.com/office/drawing/2014/main" id="{613EE758-45AB-58C6-8CD9-E3DF99E82922}"/>
+              </a:ext>
+            </a:extLst>
+          </p:cNvPr>
+          <p:cNvSpPr>
+            <a:spLocks noGrp="1"/>
+          </p:cNvSpPr>
+          <p:nvPr>
+            <p:ph type="title"/>
+          </p:nvPr>
+        </p:nvSpPr>
+        <p:spPr/>
+        <p:txBody>
+          <a:bodyPr/>
+          <a:lstStyle/>
+          <a:p>
+            <a:r>
+              <a:rPr kumimoji="1" lang="en-US" altLang="zh-CN" dirty="0"/>
+              <a:t>Questions</a:t>
+            </a:r>
+            <a:endParaRPr kumimoji="1" lang="zh-CN" altLang="en-US" dirty="0"/>
+          </a:p>
+        </p:txBody>
+      </p:sp>
+      <p:sp>
+        <p:nvSpPr>
+          <p:cNvPr id="3" name="内容占位符 2">
+            <a:extLst>
+              <a:ext uri="{FF2B5EF4-FFF2-40B4-BE49-F238E27FC236}">
+                <a16:creationId xmlns:a16="http://schemas.microsoft.com/office/drawing/2014/main" id="{4F346AEB-C21B-077C-E42E-8DC657D6550F}"/>
+              </a:ext>
+            </a:extLst>
+          </p:cNvPr>
+          <p:cNvSpPr>
+            <a:spLocks noGrp="1"/>
+          </p:cNvSpPr>
+          <p:nvPr>
+            <p:ph idx="1"/>
+          </p:nvPr>
+        </p:nvSpPr>
+        <p:spPr/>
+        <p:txBody>
+          <a:bodyPr/>
+          <a:lstStyle/>
+          <a:p>
+            <a:pPr marL="0" indent="0">
+              <a:buNone/>
+            </a:pPr>
+            <a:r>
+              <a:rPr kumimoji="1" lang="en-US" altLang="zh-CN" dirty="0"/>
+              <a:t>The </a:t>
+            </a:r>
+            <a:r>
+              <a:rPr kumimoji="1" lang="en-US" altLang="zh-CN" dirty="0">
+                <a:latin typeface="Courier New" panose="02070309020205020404" pitchFamily="49" charset="0"/>
+                <a:cs typeface="Courier New" panose="02070309020205020404" pitchFamily="49" charset="0"/>
+              </a:rPr>
+              <a:t>cv::Mat</a:t>
+            </a:r>
+            <a:r>
+              <a:rPr kumimoji="1" lang="en-US" altLang="zh-CN" dirty="0"/>
+              <a:t> class in OpenCV</a:t>
+            </a:r>
+          </a:p>
+          <a:p>
+            <a:pPr marL="0" indent="0">
+              <a:buNone/>
+            </a:pPr>
+            <a:r>
+              <a:rPr kumimoji="1" lang="en-US" altLang="zh-CN" sz="1800" dirty="0">
+                <a:hlinkClick r:id="rId2"/>
+              </a:rPr>
+              <a:t>https://github.com/opencv/opencv/blob/4.x/modules/core/include/opencv2/core/mat.hpp</a:t>
+            </a:r>
+            <a:r>
+              <a:rPr kumimoji="1" lang="en-US" altLang="zh-CN" sz="1800" dirty="0"/>
+              <a:t> </a:t>
+            </a:r>
+          </a:p>
+          <a:p>
+            <a:endParaRPr kumimoji="1" lang="en-US" altLang="zh-CN" dirty="0"/>
+          </a:p>
+          <a:p>
+            <a:r>
+              <a:rPr kumimoji="1" lang="en-US" altLang="zh-CN" dirty="0"/>
+              <a:t>List all its data members?</a:t>
+            </a:r>
+          </a:p>
+          <a:p>
+            <a:r>
+              <a:rPr kumimoji="1" lang="en-US" altLang="zh-CN" dirty="0"/>
+              <a:t>How many member functions does it contain?</a:t>
+            </a:r>
+            <a:endParaRPr kumimoji="1" lang="zh-CN" altLang="en-US" dirty="0"/>
+          </a:p>
+        </p:txBody>
+      </p:sp>
+    </p:spTree>
+    <p:extLst>
+      <p:ext uri="{BB962C8B-B14F-4D97-AF65-F5344CB8AC3E}">
+        <p14:creationId xmlns:p14="http://schemas.microsoft.com/office/powerpoint/2010/main" val="3779394726"/>
+      </p:ext>
+    </p:extLst>
+  </p:cSld>
+  <p:clrMapOvr>
+    <a:masterClrMapping/>
+  </p:clrMapOvr>
 </p:sld>
 </file>
 
